--- a/decks/hist-civil-rights/hist-civil-rights_ch2_jim-crow.pptx
+++ b/decks/hist-civil-rights/hist-civil-rights_ch2_jim-crow.pptx
@@ -130,31 +130,31 @@
   <p:extLst>
     <p:ext uri="{521415D9-36F7-43E2-AB2F-B90AF26B5E84}">
       <p14:sectionLst xmlns:p14="http://schemas.microsoft.com/office/powerpoint/2010/main">
-        <p14:section name="Opening" id="{731bf804-b935-96fe-58df-7f2c20fe50d5}">
+        <p14:section name="Opening" id="{c36b5c18-8d6e-a2c1-98b6-5d47a47f158c}">
           <p14:sldIdLst>
             <p14:sldId id="256"/>
           </p14:sldIdLst>
         </p14:section>
-        <p14:section name="Gate" id="{5d948caf-1ffa-4f25-96e3-79bb29f9a585}">
+        <p14:section name="Gate" id="{3d82f9b8-1403-b468-b5b2-b598fe012d13}">
           <p14:sldIdLst>
             <p14:sldId id="257"/>
             <p14:sldId id="258"/>
             <p14:sldId id="259"/>
           </p14:sldIdLst>
         </p14:section>
-        <p14:section name="Pre-teach" id="{72b5075e-2664-c230-e58e-fe8018bd1487}">
+        <p14:section name="Pre-teach" id="{32436c13-54b1-3ac6-0479-0192d108e79f}">
           <p14:sldIdLst>
             <p14:sldId id="260"/>
             <p14:sldId id="261"/>
           </p14:sldIdLst>
         </p14:section>
-        <p14:section name="Read-along" id="{0a985fe4-11ac-d7a0-6d59-50e34b6dc8d6}">
+        <p14:section name="Read-along" id="{4b6a9f39-890e-ce68-22a6-b430ff05c8a8}">
           <p14:sldIdLst>
             <p14:sldId id="262"/>
             <p14:sldId id="263"/>
           </p14:sldIdLst>
         </p14:section>
-        <p14:section name="Teach" id="{a663b9b9-6143-9c3b-6680-690df46064ee}">
+        <p14:section name="Teach" id="{88236ec1-8361-7e87-de8c-ce85b33a5e6f}">
           <p14:sldIdLst>
             <p14:sldId id="264"/>
             <p14:sldId id="265"/>
@@ -164,7 +164,7 @@
             <p14:sldId id="269"/>
           </p14:sldIdLst>
         </p14:section>
-        <p14:section name="Routes" id="{4bab3f50-065a-04aa-a477-8660fcaefa1f}">
+        <p14:section name="Routes" id="{14df580f-acfa-3b5a-da57-064110fb35b0}">
           <p14:sldIdLst>
             <p14:sldId id="270"/>
             <p14:sldId id="271"/>
@@ -173,12 +173,12 @@
             <p14:sldId id="274"/>
           </p14:sldIdLst>
         </p14:section>
-        <p14:section name="Close" id="{4e54899a-09aa-3926-e1b4-f3e711ec39ab}">
+        <p14:section name="Close" id="{494cba5b-137e-756e-ccc1-ae047f73f53a}">
           <p14:sldIdLst>
             <p14:sldId id="275"/>
           </p14:sldIdLst>
         </p14:section>
-        <p14:section name="Answers" id="{8880e9bd-a748-065b-2112-8cfafdf85483}">
+        <p14:section name="Answers" id="{ae1ddced-724f-e868-3051-66fda5f5bca8}">
           <p14:sldIdLst>
             <p14:sldId id="276"/>
             <p14:sldId id="277"/>
